--- a/slides/lecture2_deciding_under_uncertainty.pptx
+++ b/slides/lecture2_deciding_under_uncertainty.pptx
@@ -10175,7 +10175,7 @@
                 <a:ea typeface="Calibri" pitchFamily="34" charset="-122"/>
                 <a:cs typeface="Calibri" pitchFamily="34" charset="-120"/>
               </a:rPr>
-              <a:t>Each team gets development data and six months of deployment data from one hospital. Identical columns, identical task. Work out what is wrong, who it is wrong for, when the model should refuse to answer, and whether you would switch it on. Five minutes, three or four slides.</a:t>
+              <a:t>Each team gets development data and six months of shadow-mode records from one hospital - the model scored every admission, nobody acted on the scores. Identical columns, identical task. Work out what is wrong, who it is wrong for, when the model should refuse to answer, and whether you would switch it on. Five minutes, three or four slides.</a:t>
             </a:r>
             <a:endParaRPr lang="en-US" sz="1800" dirty="0"/>
           </a:p>
@@ -13721,7 +13721,7 @@
                 <a:ea typeface="Calibri" pitchFamily="34" charset="-122"/>
                 <a:cs typeface="Calibri" pitchFamily="34" charset="-120"/>
               </a:rPr>
-              <a:t>The threshold is the 95th percentile of disagreement measured on the development data alone - so it can be set before the model is switched on.</a:t>
+              <a:t>The threshold is the 95th percentile of disagreement measured on the development data alone - so it can be set before the model goes live.</a:t>
             </a:r>
             <a:endParaRPr lang="en-US" sz="1550" dirty="0"/>
           </a:p>

--- a/slides/lecture2_deciding_under_uncertainty.pptx
+++ b/slides/lecture2_deciding_under_uncertainty.pptx
@@ -3910,7 +3910,7 @@
                 <a:ea typeface="Calibri" pitchFamily="34" charset="-122"/>
                 <a:cs typeface="Calibri" pitchFamily="34" charset="-120"/>
               </a:rPr>
-              <a:t>That last number is why this is worth more than it costs. Every other diagnostic in this lecture waits on outcomes; this one does not.</a:t>
+              <a:t>This proxy needs no target outcome labels, but success in one simulated ward does not guarantee safe detection elsewhere.</a:t>
             </a:r>
             <a:endParaRPr lang="en-US" sz="1700" dirty="0"/>
           </a:p>
@@ -4046,7 +4046,7 @@
                 <a:ea typeface="Calibri" pitchFamily="34" charset="-122"/>
                 <a:cs typeface="Calibri" pitchFamily="34" charset="-120"/>
               </a:rPr>
-              <a:t>A patient far outside the data can still receive confident, wrong, unanimous predictions if the model form extrapolates smoothly. Treat this as a screen, not a guarantee. Deep ensembles, MC dropout and conformal prediction differ in machinery and play the same logical role - conformal is worth naming, because its coverage guarantee assumes exchangeability, and exchangeability is exactly what site B broke.</a:t>
+              <a:t>A patient far outside the data can still receive confident, wrong, unanimous predictions if the model form extrapolates smoothly. Treat this as a screen, not a guarantee. Ensembles, conformal prediction and input-drift checks address different questions - conformal coverage guarantees generally depend on exchangeability; they do not certify target-site safety when that assumption fails.</a:t>
             </a:r>
             <a:endParaRPr lang="en-US" sz="1800" dirty="0"/>
           </a:p>
@@ -4827,7 +4827,7 @@
                 <a:ea typeface="Calibri" pitchFamily="34" charset="-122"/>
                 <a:cs typeface="Calibri" pitchFamily="34" charset="-120"/>
               </a:rPr>
-              <a:t>Defers patients the model was never equipped to judge.</a:t>
+              <a:t>May flag patients for whom the fitted model is unstable.</a:t>
             </a:r>
             <a:endParaRPr lang="en-US" sz="1450" dirty="0"/>
           </a:p>
@@ -4856,7 +4856,7 @@
                 <a:ea typeface="Calibri" pitchFamily="34" charset="-122"/>
                 <a:cs typeface="Calibri" pitchFamily="34" charset="-120"/>
               </a:rPr>
-              <a:t>Improves the error rate less, and protects you from confidently harming someone.</a:t>
+              <a:t>Does not detect every unfamiliar patient and cannot guarantee safe deployment.</a:t>
             </a:r>
             <a:endParaRPr lang="en-US" sz="1450" dirty="0"/>
           </a:p>
@@ -4885,7 +4885,7 @@
                 <a:ea typeface="Calibri" pitchFamily="34" charset="-122"/>
                 <a:cs typeface="Calibri" pitchFamily="34" charset="-120"/>
               </a:rPr>
-              <a:t>Use it as a hard gate on patients outside the model's competence.</a:t>
+              <a:t>Evaluate this signal before using it as a referral rule.</a:t>
             </a:r>
             <a:endParaRPr lang="en-US" sz="1450" dirty="0"/>
           </a:p>
@@ -5099,7 +5099,7 @@
                 <a:ea typeface="Calibri" pitchFamily="34" charset="-122"/>
                 <a:cs typeface="Calibri" pitchFamily="34" charset="-120"/>
               </a:rPr>
-              <a:t>predict &gt;= 0.5 encodes the assumption that a missed deterioration and an unnecessary escalation cost the same. No clinician believes that.</a:t>
+              <a:t>A default threshold of 0.5 is rarely justified without specifying the consequences of mistakes and the care pathway.</a:t>
             </a:r>
             <a:endParaRPr lang="en-US" sz="1800" dirty="0"/>
           </a:p>
@@ -5170,7 +5170,7 @@
                 <a:ea typeface="Calibri" pitchFamily="34" charset="-122"/>
                 <a:cs typeface="Calibri" pitchFamily="34" charset="-120"/>
               </a:rPr>
-              <a:t>IF A MISSED EVENT IS R TIMES AS COSTLY AS A FALSE ALARM, THE OPTIMAL THRESHOLD IS 1 / (1 + R)</a:t>
+              <a:t>IDEALISED TWO-ACTION COST MODEL: ASSUMING CALIBRATED RISKS, THRESHOLD = 1 / (1 + R)</a:t>
             </a:r>
             <a:endParaRPr lang="en-US" sz="1300" dirty="0"/>
           </a:p>
@@ -6653,7 +6653,7 @@
                 <a:ea typeface="Calibri" pitchFamily="34" charset="-122"/>
                 <a:cs typeface="Calibri" pitchFamily="34" charset="-120"/>
               </a:rPr>
-              <a:t>The useful range is nowhere near 0.5. Reporting accuracy at 0.5 describes a decision nobody would make - and the uncorrected model under-alerts worst exactly where the clinical value lives.</a:t>
+              <a:t>Here the useful range is far below 0.5. These thresholds come from simplified cost assumptions and must be adapted to the clinical workflow; the uncorrected model under-alerts worst exactly where the clinical value lives.</a:t>
             </a:r>
             <a:endParaRPr lang="en-US" sz="1550" dirty="0"/>
           </a:p>
@@ -10039,7 +10039,7 @@
                 <a:ea typeface="Calibri" pitchFamily="34" charset="-122"/>
                 <a:cs typeface="Calibri" pitchFamily="34" charset="-120"/>
               </a:rPr>
-              <a:t>Six teams. One task. Six different reasons the model should not be trusted.</a:t>
+              <a:t>One open question: can we trust a model at a new hospital with very few outcome labels?</a:t>
             </a:r>
             <a:endParaRPr lang="en-US" sz="1800" dirty="0"/>
           </a:p>
@@ -10175,7 +10175,7 @@
                 <a:ea typeface="Calibri" pitchFamily="34" charset="-122"/>
                 <a:cs typeface="Calibri" pitchFamily="34" charset="-120"/>
               </a:rPr>
-              <a:t>Each team gets development data and six months of shadow-mode records from one hospital - the model scored every admission, nobody acted on the scores. Identical columns, identical task. Work out what is wrong, who it is wrong for, when the model should refuse to answer, and whether you would switch it on. Five minutes, three or four slides.</a:t>
+              <a:t>Teams receive 4,000 labeled source records, 1,600 unlabeled new-hospital records, and 75 randomly audited outcomes. Decide whether to stay in shadow mode, adapt, or defer predictions and what evidence you would collect next. No fixed answer, no formal grading. Five minutes, three slides.</a:t>
             </a:r>
             <a:endParaRPr lang="en-US" sz="1800" dirty="0"/>
           </a:p>
@@ -10204,7 +10204,7 @@
                 <a:ea typeface="Calibri" pitchFamily="34" charset="-122"/>
                 <a:cs typeface="Calibri" pitchFamily="34" charset="-120"/>
               </a:rPr>
-              <a:t>Read project/PROJECT_BRIEF.md and start from notebooks/90_team_project_starter.ipynb.</a:t>
+              <a:t>Read project/OPEN_RESEARCH_CHALLENGE.md and open notebooks/91_open_research_challenge_starter.ipynb.</a:t>
             </a:r>
             <a:endParaRPr lang="en-US" sz="1800" dirty="0"/>
           </a:p>
@@ -13636,7 +13636,7 @@
                 <a:ea typeface="Cambria" pitchFamily="34" charset="-122"/>
                 <a:cs typeface="Cambria" pitchFamily="34" charset="-120"/>
               </a:rPr>
-              <a:t>Disagreement finds patients the model was never trained for</a:t>
+              <a:t>In this simulation, disagreement flags unfamiliar patients</a:t>
             </a:r>
             <a:endParaRPr lang="en-US" sz="3000" dirty="0"/>
           </a:p>

--- a/slides/lecture2_deciding_under_uncertainty.pptx
+++ b/slides/lecture2_deciding_under_uncertainty.pptx
@@ -13354,7 +13354,7 @@
                 <a:ea typeface="Calibri" pitchFamily="34" charset="-122"/>
                 <a:cs typeface="Calibri" pitchFamily="34" charset="-120"/>
               </a:rPr>
-              <a:t>A one-parameter fix on 100 charts beats a non-parametric fix on the same 100 charts, every time.</a:t>
+              <a:t>A one-parameter fix on 100 charts performs better than the more flexible alternative in this simulation.</a:t>
             </a:r>
             <a:endParaRPr lang="en-US" sz="1350" dirty="0"/>
           </a:p>

--- a/slides/lecture2_deciding_under_uncertainty.pptx
+++ b/slides/lecture2_deciding_under_uncertainty.pptx
@@ -3910,7 +3910,7 @@
                 <a:ea typeface="Calibri" pitchFamily="34" charset="-122"/>
                 <a:cs typeface="Calibri" pitchFamily="34" charset="-120"/>
               </a:rPr>
-              <a:t>That last number is why this is worth more than it costs. Every other diagnostic in this lecture waits on outcomes; this one does not.</a:t>
+              <a:t>This proxy needs no target outcome labels, but success in one simulated ward does not guarantee safe detection elsewhere.</a:t>
             </a:r>
             <a:endParaRPr lang="en-US" sz="1700" dirty="0"/>
           </a:p>
@@ -4046,7 +4046,7 @@
                 <a:ea typeface="Calibri" pitchFamily="34" charset="-122"/>
                 <a:cs typeface="Calibri" pitchFamily="34" charset="-120"/>
               </a:rPr>
-              <a:t>A patient far outside the data can still receive confident, wrong, unanimous predictions if the model form extrapolates smoothly. Treat this as a screen, not a guarantee. Deep ensembles, MC dropout and conformal prediction differ in machinery and play the same logical role - conformal is worth naming, because its coverage guarantee assumes exchangeability, and exchangeability is exactly what site B broke.</a:t>
+              <a:t>A patient far outside the data can still receive confident, wrong, unanimous predictions if the model form extrapolates smoothly. Treat this as a screen, not a guarantee. Ensembles, conformal prediction and input-drift checks address different questions - conformal coverage guarantees generally depend on exchangeability; they do not certify target-site safety when that assumption fails.</a:t>
             </a:r>
             <a:endParaRPr lang="en-US" sz="1800" dirty="0"/>
           </a:p>
@@ -4827,7 +4827,7 @@
                 <a:ea typeface="Calibri" pitchFamily="34" charset="-122"/>
                 <a:cs typeface="Calibri" pitchFamily="34" charset="-120"/>
               </a:rPr>
-              <a:t>Defers patients the model was never equipped to judge.</a:t>
+              <a:t>May flag patients for whom the fitted model is unstable.</a:t>
             </a:r>
             <a:endParaRPr lang="en-US" sz="1450" dirty="0"/>
           </a:p>
@@ -4856,7 +4856,7 @@
                 <a:ea typeface="Calibri" pitchFamily="34" charset="-122"/>
                 <a:cs typeface="Calibri" pitchFamily="34" charset="-120"/>
               </a:rPr>
-              <a:t>Improves the error rate less, and protects you from confidently harming someone.</a:t>
+              <a:t>Does not detect every unfamiliar patient and cannot guarantee safe deployment.</a:t>
             </a:r>
             <a:endParaRPr lang="en-US" sz="1450" dirty="0"/>
           </a:p>
@@ -4885,7 +4885,7 @@
                 <a:ea typeface="Calibri" pitchFamily="34" charset="-122"/>
                 <a:cs typeface="Calibri" pitchFamily="34" charset="-120"/>
               </a:rPr>
-              <a:t>Use it as a hard gate on patients outside the model's competence.</a:t>
+              <a:t>Evaluate this signal before using it as a referral rule.</a:t>
             </a:r>
             <a:endParaRPr lang="en-US" sz="1450" dirty="0"/>
           </a:p>
@@ -5099,7 +5099,7 @@
                 <a:ea typeface="Calibri" pitchFamily="34" charset="-122"/>
                 <a:cs typeface="Calibri" pitchFamily="34" charset="-120"/>
               </a:rPr>
-              <a:t>predict &gt;= 0.5 encodes the assumption that a missed deterioration and an unnecessary escalation cost the same. No clinician believes that.</a:t>
+              <a:t>A default threshold of 0.5 is rarely justified without specifying the consequences of mistakes and the care pathway.</a:t>
             </a:r>
             <a:endParaRPr lang="en-US" sz="1800" dirty="0"/>
           </a:p>
@@ -5170,7 +5170,7 @@
                 <a:ea typeface="Calibri" pitchFamily="34" charset="-122"/>
                 <a:cs typeface="Calibri" pitchFamily="34" charset="-120"/>
               </a:rPr>
-              <a:t>IF A MISSED EVENT IS R TIMES AS COSTLY AS A FALSE ALARM, THE OPTIMAL THRESHOLD IS 1 / (1 + R)</a:t>
+              <a:t>IDEALISED TWO-ACTION COST MODEL: ASSUMING CALIBRATED RISKS, THRESHOLD = 1 / (1 + R)</a:t>
             </a:r>
             <a:endParaRPr lang="en-US" sz="1300" dirty="0"/>
           </a:p>
@@ -6653,7 +6653,7 @@
                 <a:ea typeface="Calibri" pitchFamily="34" charset="-122"/>
                 <a:cs typeface="Calibri" pitchFamily="34" charset="-120"/>
               </a:rPr>
-              <a:t>The useful range is nowhere near 0.5. Reporting accuracy at 0.5 describes a decision nobody would make - and the uncorrected model under-alerts worst exactly where the clinical value lives.</a:t>
+              <a:t>Here the useful range is far below 0.5. These thresholds come from simplified cost assumptions and must be adapted to the clinical workflow; the uncorrected model under-alerts worst exactly where the clinical value lives.</a:t>
             </a:r>
             <a:endParaRPr lang="en-US" sz="1550" dirty="0"/>
           </a:p>
@@ -10039,7 +10039,7 @@
                 <a:ea typeface="Calibri" pitchFamily="34" charset="-122"/>
                 <a:cs typeface="Calibri" pitchFamily="34" charset="-120"/>
               </a:rPr>
-              <a:t>Six teams. One task. Six different reasons the model should not be trusted.</a:t>
+              <a:t>One open question: can we trust a model at a new hospital with very few outcome labels?</a:t>
             </a:r>
             <a:endParaRPr lang="en-US" sz="1800" dirty="0"/>
           </a:p>
@@ -10175,7 +10175,7 @@
                 <a:ea typeface="Calibri" pitchFamily="34" charset="-122"/>
                 <a:cs typeface="Calibri" pitchFamily="34" charset="-120"/>
               </a:rPr>
-              <a:t>Each team gets development data and six months of shadow-mode records from one hospital - the model scored every admission, nobody acted on the scores. Identical columns, identical task. Work out what is wrong, who it is wrong for, when the model should refuse to answer, and whether you would switch it on. Five minutes, three or four slides.</a:t>
+              <a:t>Teams receive 4,000 labeled source records, 1,600 unlabeled new-hospital records, and 75 randomly audited outcomes. Decide whether to stay in shadow mode, adapt, or defer predictions and what evidence you would collect next. No fixed answer, no formal grading. Five minutes, three slides.</a:t>
             </a:r>
             <a:endParaRPr lang="en-US" sz="1800" dirty="0"/>
           </a:p>
@@ -10204,7 +10204,7 @@
                 <a:ea typeface="Calibri" pitchFamily="34" charset="-122"/>
                 <a:cs typeface="Calibri" pitchFamily="34" charset="-120"/>
               </a:rPr>
-              <a:t>Read project/PROJECT_BRIEF.md and start from notebooks/90_team_project_starter.ipynb.</a:t>
+              <a:t>Read project/OPEN_RESEARCH_CHALLENGE.md and open notebooks/91_open_research_challenge_starter.ipynb.</a:t>
             </a:r>
             <a:endParaRPr lang="en-US" sz="1800" dirty="0"/>
           </a:p>
@@ -13354,7 +13354,7 @@
                 <a:ea typeface="Calibri" pitchFamily="34" charset="-122"/>
                 <a:cs typeface="Calibri" pitchFamily="34" charset="-120"/>
               </a:rPr>
-              <a:t>A one-parameter fix on 100 charts beats a non-parametric fix on the same 100 charts, every time.</a:t>
+              <a:t>A one-parameter fix on 100 charts performs better than the more flexible alternative in this simulation.</a:t>
             </a:r>
             <a:endParaRPr lang="en-US" sz="1350" dirty="0"/>
           </a:p>
@@ -13636,7 +13636,7 @@
                 <a:ea typeface="Cambria" pitchFamily="34" charset="-122"/>
                 <a:cs typeface="Cambria" pitchFamily="34" charset="-120"/>
               </a:rPr>
-              <a:t>Disagreement finds patients the model was never trained for</a:t>
+              <a:t>In this simulation, disagreement flags unfamiliar patients</a:t>
             </a:r>
             <a:endParaRPr lang="en-US" sz="3000" dirty="0"/>
           </a:p>
